--- a/decks/geog-gis/geog-gis_ch4_making-a-map.pptx
+++ b/decks/geog-gis/geog-gis_ch4_making-a-map.pptx
@@ -125,30 +125,30 @@
   <p:extLst>
     <p:ext uri="{521415D9-36F7-43E2-AB2F-B90AF26B5E84}">
       <p14:sectionLst xmlns:p14="http://schemas.microsoft.com/office/powerpoint/2010/main">
-        <p14:section name="Opening" id="{fe6a7f3b-7e16-a723-d444-2613b4c623bc}">
+        <p14:section name="Opening" id="{3a8c7760-cfa7-a310-ae27-8f80622c360d}">
           <p14:sldIdLst>
             <p14:sldId id="256"/>
           </p14:sldIdLst>
         </p14:section>
-        <p14:section name="Gate" id="{51f03b4e-f602-51c5-9074-52a2a6098761}">
+        <p14:section name="Gate" id="{bc5a8ac2-1e56-a372-c91c-e9f55d06da29}">
           <p14:sldIdLst>
             <p14:sldId id="257"/>
             <p14:sldId id="258"/>
           </p14:sldIdLst>
         </p14:section>
-        <p14:section name="Pre-teach" id="{a5ba396e-b244-75b1-6f9b-e9f4cdff1a29}">
+        <p14:section name="Pre-teach" id="{bafc6c6f-f8a0-b16a-e32a-fcef0714fa7e}">
           <p14:sldIdLst>
             <p14:sldId id="259"/>
             <p14:sldId id="260"/>
           </p14:sldIdLst>
         </p14:section>
-        <p14:section name="Read-along" id="{5666fcfe-af34-0803-d0bc-fa9b1599e059}">
+        <p14:section name="Read-along" id="{ac926182-4f9b-5406-6209-fa7bd4e84c42}">
           <p14:sldIdLst>
             <p14:sldId id="261"/>
             <p14:sldId id="262"/>
           </p14:sldIdLst>
         </p14:section>
-        <p14:section name="Teach" id="{f1d72066-0375-8f2a-45d2-265c9cfd616b}">
+        <p14:section name="Teach" id="{1ef99e70-f9b6-b4bd-4842-f65d19164239}">
           <p14:sldIdLst>
             <p14:sldId id="263"/>
             <p14:sldId id="264"/>
@@ -156,7 +156,7 @@
             <p14:sldId id="266"/>
           </p14:sldIdLst>
         </p14:section>
-        <p14:section name="Routes" id="{a3f46e9c-110d-a4ab-2ac8-28e02b7dcdd3}">
+        <p14:section name="Routes" id="{48338942-af67-7d34-7357-1657a55ea667}">
           <p14:sldIdLst>
             <p14:sldId id="267"/>
             <p14:sldId id="268"/>
@@ -164,12 +164,12 @@
             <p14:sldId id="270"/>
           </p14:sldIdLst>
         </p14:section>
-        <p14:section name="Close" id="{9d8c2c6a-f5cc-6d09-5f98-2e1ae2844925}">
+        <p14:section name="Close" id="{364dc06b-95be-4367-5425-98c378fd53b6}">
           <p14:sldIdLst>
             <p14:sldId id="271"/>
           </p14:sldIdLst>
         </p14:section>
-        <p14:section name="Answers" id="{8d396f34-67bf-41d4-2872-895c5fc0ee18}">
+        <p14:section name="Answers" id="{56847505-07df-a656-8a61-868828c54168}">
           <p14:sldIdLst>
             <p14:sldId id="272"/>
             <p14:sldId id="273"/>
